--- a/it/slides/12-Architettura_dei_Calcolatori-Verm1_Parte_2-Lab.pptx
+++ b/it/slides/12-Architettura_dei_Calcolatori-Verm1_Parte_2-Lab.pptx
@@ -131,24 +131,24 @@
   <p:extLst>
     <p:ext uri="{521415D9-36F7-43E2-AB2F-B90AF26B5E84}">
       <p14:sectionLst xmlns:p14="http://schemas.microsoft.com/office/powerpoint/2010/main">
-        <p14:section name="Apertura" id="{ada64675-c749-ac98-17fa-7ad583bed57a}">
+        <p14:section name="Apertura" id="{34c78cc8-55b8-ba40-319e-2c5b21e74336}">
           <p14:sldIdLst>
             <p14:sldId id="256"/>
             <p14:sldId id="257"/>
           </p14:sldIdLst>
         </p14:section>
-        <p14:section name="I listati" id="{8f3da941-864a-1eaa-c084-7dedec0cf16e}">
+        <p14:section name="I listati" id="{9a61d86a-4e93-224f-ff26-a0a801adaa74}">
           <p14:sldIdLst>
             <p14:sldId id="258"/>
           </p14:sldIdLst>
         </p14:section>
-        <p14:section name="Passo 1: nomi per i bit" id="{009b1aad-3ddf-3f71-3803-af98df7f977c}">
+        <p14:section name="Passo 1: nomi per i bit" id="{5e1e9cb9-436e-8d82-1881-32f623228bf5}">
           <p14:sldIdLst>
             <p14:sldId id="259"/>
             <p14:sldId id="260"/>
           </p14:sldIdLst>
         </p14:section>
-        <p14:section name="Passo 2: la guida" id="{6199a365-a05b-eebf-a127-faa71c818f63}">
+        <p14:section name="Passo 2: la guida" id="{81eea19d-8e75-73fe-557d-0ef83ee064bf}">
           <p14:sldIdLst>
             <p14:sldId id="261"/>
             <p14:sldId id="262"/>
@@ -158,7 +158,7 @@
             <p14:sldId id="266"/>
           </p14:sldIdLst>
         </p14:section>
-        <p14:section name="Passo 3: il cibo, un punteggio, un suono" id="{b5394304-ddad-6df9-109e-83b132855cdf}">
+        <p14:section name="Passo 3: il cibo, un punteggio, un suono" id="{e33d8676-bf9d-4892-3a83-2213f3183410}">
           <p14:sldIdLst>
             <p14:sldId id="267"/>
             <p14:sldId id="268"/>
@@ -170,7 +170,7 @@
             <p14:sldId id="274"/>
           </p14:sldIdLst>
         </p14:section>
-        <p14:section name="Eseguire e provare" id="{9b1bc8ea-d316-ce02-39f2-3c827cae770c}">
+        <p14:section name="Eseguire e provare" id="{d4d1a0d8-b832-6367-f6ec-de0a008d5837}">
           <p14:sldIdLst>
             <p14:sldId id="275"/>
             <p14:sldId id="276"/>
@@ -179,7 +179,7 @@
             <p14:sldId id="279"/>
           </p14:sldIdLst>
         </p14:section>
-        <p14:section name="Esercizi" id="{90dd8c99-5597-bdb0-1c6b-7240fcb3efb7}">
+        <p14:section name="Esercizi" id="{4acd82af-4d81-eab8-9d3a-4499fb21abaa}">
           <p14:sldIdLst>
             <p14:sldId id="280"/>
           </p14:sldIdLst>

--- a/it/slides/12-Architettura_dei_Calcolatori-Verm1_Parte_2-Lab.pptx
+++ b/it/slides/12-Architettura_dei_Calcolatori-Verm1_Parte_2-Lab.pptx
@@ -131,24 +131,24 @@
   <p:extLst>
     <p:ext uri="{521415D9-36F7-43E2-AB2F-B90AF26B5E84}">
       <p14:sectionLst xmlns:p14="http://schemas.microsoft.com/office/powerpoint/2010/main">
-        <p14:section name="Apertura" id="{34c78cc8-55b8-ba40-319e-2c5b21e74336}">
+        <p14:section name="Apertura" id="{a42bf1e3-70fd-2810-ff7f-d6869a876439}">
           <p14:sldIdLst>
             <p14:sldId id="256"/>
             <p14:sldId id="257"/>
           </p14:sldIdLst>
         </p14:section>
-        <p14:section name="I listati" id="{9a61d86a-4e93-224f-ff26-a0a801adaa74}">
+        <p14:section name="I listati" id="{62240116-6244-01e7-e8e6-57c0a3694511}">
           <p14:sldIdLst>
             <p14:sldId id="258"/>
           </p14:sldIdLst>
         </p14:section>
-        <p14:section name="Passo 1: nomi per i bit" id="{5e1e9cb9-436e-8d82-1881-32f623228bf5}">
+        <p14:section name="Passo 1: nomi per i bit" id="{9efc4266-a793-4ae5-27c4-92d9b56f6d94}">
           <p14:sldIdLst>
             <p14:sldId id="259"/>
             <p14:sldId id="260"/>
           </p14:sldIdLst>
         </p14:section>
-        <p14:section name="Passo 2: la guida" id="{81eea19d-8e75-73fe-557d-0ef83ee064bf}">
+        <p14:section name="Passo 2: la guida" id="{012655d3-ce1c-5dd2-bbad-232c73211650}">
           <p14:sldIdLst>
             <p14:sldId id="261"/>
             <p14:sldId id="262"/>
@@ -158,7 +158,7 @@
             <p14:sldId id="266"/>
           </p14:sldIdLst>
         </p14:section>
-        <p14:section name="Passo 3: il cibo, un punteggio, un suono" id="{e33d8676-bf9d-4892-3a83-2213f3183410}">
+        <p14:section name="Passo 3: il cibo, un punteggio, un suono" id="{b6c042f3-b7e0-840c-6653-0dc21e9d5d1c}">
           <p14:sldIdLst>
             <p14:sldId id="267"/>
             <p14:sldId id="268"/>
@@ -170,7 +170,7 @@
             <p14:sldId id="274"/>
           </p14:sldIdLst>
         </p14:section>
-        <p14:section name="Eseguire e provare" id="{d4d1a0d8-b832-6367-f6ec-de0a008d5837}">
+        <p14:section name="Eseguire e provare" id="{03940537-67d4-6b24-88f3-961c02a546f6}">
           <p14:sldIdLst>
             <p14:sldId id="275"/>
             <p14:sldId id="276"/>
@@ -179,7 +179,7 @@
             <p14:sldId id="279"/>
           </p14:sldIdLst>
         </p14:section>
-        <p14:section name="Esercizi" id="{4acd82af-4d81-eab8-9d3a-4499fb21abaa}">
+        <p14:section name="Esercizi" id="{8112176b-7ce0-553d-f482-d27ddd2d6d0b}">
           <p14:sldIdLst>
             <p14:sldId id="280"/>
           </p14:sldIdLst>
@@ -590,7 +590,9 @@
               <a:rPr lang="en-US" dirty="0"/>
               <a:t>Questa è la presentazione del codice della Lezione 12. Mentre la presentazione della lezione sviluppa i concetti, questa raccoglie tutto ciò che si scrive e si esegue: ogni listato con il suo commento, il programma completo della lezione, il risultato che deve produrre, e la procedura per provarlo su ciascuno dei tre host. Le due presentazioni vanno lette insieme: i concetti spiegano il codice, e il codice dà ai concetti una conseguenza osservabile.
 Stato di apprendimento: DA COMPRENDERE OGGI, alla fine di questa lezione lo spiegate, lo seguite passo passo e lo applicate da soli; DA UTILIZZARE OGGI, oggi seguite e usate la ricetta; come funziona dentro si spiega più avanti, o non fa parte del corso; DA COMPRENDERE PIÙ AVANTI, riconoscete il nome e lo scopo; lo spiega una lezione successiva. Una slide senza etichetta è contesto: una storia, un esempio, una domanda, un esercizio.
-Stato di apprendimento di questa lezione. DA COMPRENDERE OGGI: le maschere di bit; i codici; gli array in memoria; gli ingressi con pull-up; l'algebra di Boole; la virgola fissa; i multiplexer; istruzioni con o senza segno; comparatori e parità; gli argomenti in a0 ... a7. DA UTILIZZARE OGGI: la convenzione di chiamata (Lezione 18) e, usati senza essere studiati nel corso, gli strumenti di PRG32, le chiamate del runtime PRG32, il debugger di PRG32-QT. DA COMPRENDERE PIÙ AVANTI: niente. Una slide senza etichetta è contesto: una storia, un esempio, una domanda, un esercizio.</a:t>
+Stato di apprendimento di questa lezione. DA COMPRENDERE OGGI: le maschere di bit; i codici; gli array in memoria; gli ingressi con pull-up; l'algebra di Boole; la virgola fissa; i multiplexer; istruzioni con o senza segno; comparatori e parità; gli argomenti in a0 ... a7. DA UTILIZZARE OGGI: la convenzione di chiamata (Lezione 18) e, usati senza essere studiati nel corso, gli strumenti di PRG32, le chiamate del runtime PRG32, il debugger di PRG32-QT. DA COMPRENDERE PIÙ AVANTI: niente. Una slide senza etichetta è contesto: una storia, un esempio, una domanda, un esercizio.
+Percorso. I risultati di oggi: (1) leggere i pulsanti con le maschere e rifiutare un'inversione a U con un solo XOR; (2) confrontare posizioni con XOR e OR per riconoscere il cibo; (3) tenere e mostrare un punteggio. Si appoggia su: le maschere di bit (Lezione 08); i codici (Lezione 11); gli array in memoria (Lezione 04); gli ingressi con pull-up (Lezione 10); l'algebra di Boole (Lezione 08). Prossimo passo: Lezione 13, Macchine sequenziali.
+Ponte. Nella Lezione 07 una funzione che ne chiama un'altra salvava ra in un frame di 16 byte. Oggi le funzioni di Verm1 si chiamano più in profondità: ciascuna salva ra una volta, all'ingresso, e lo ripristina prima di ret. La Lezione 18 enuncia le regole: quali registri una chiamata può cambiare e quali deve conservare. Richiamo: Una funzione chiama altre due funzioni. Quante volte deve salvare ra, e dove?</a:t>
             </a:r>
             <a:endParaRPr lang="en-US" dirty="0"/>
           </a:p>
